--- a/论文图片/图片转pdf/第四章/新建 PPTX 演示文稿.pptx
+++ b/论文图片/图片转pdf/第四章/新建 PPTX 演示文稿.pptx
@@ -2930,137 +2930,112 @@
         <p:nvPr/>
       </p:nvGrpSpPr>
       <p:grpSpPr/>
-      <p:grpSp>
-        <p:nvGrpSpPr>
-          <p:cNvPr id="50" name="组合 49"/>
-          <p:cNvGrpSpPr/>
+      <p:sp>
+        <p:nvSpPr>
+          <p:cNvPr id="16" name="矩形 15"/>
+          <p:cNvSpPr/>
           <p:nvPr/>
-        </p:nvGrpSpPr>
-        <p:grpSpPr>
+        </p:nvSpPr>
+        <p:spPr>
           <a:xfrm>
-            <a:off x="64390" y="118475"/>
-            <a:ext cx="11042650" cy="4154170"/>
-            <a:chOff x="298" y="2269"/>
-            <a:chExt cx="17390" cy="6542"/>
+            <a:off x="64135" y="680720"/>
+            <a:ext cx="2345690" cy="3592195"/>
           </a:xfrm>
-        </p:grpSpPr>
-        <p:sp>
-          <p:nvSpPr>
-            <p:cNvPr id="16" name="矩形 15"/>
-            <p:cNvSpPr/>
-            <p:nvPr/>
-          </p:nvSpPr>
-          <p:spPr>
-            <a:xfrm>
-              <a:off x="298" y="3154"/>
-              <a:ext cx="3694" cy="5657"/>
-            </a:xfrm>
-            <a:prstGeom prst="rect">
-              <a:avLst/>
-            </a:prstGeom>
+          <a:prstGeom prst="rect">
+            <a:avLst/>
+          </a:prstGeom>
+          <a:solidFill>
+            <a:srgbClr val="E6F1E0"/>
+          </a:solidFill>
+          <a:ln>
             <a:solidFill>
-              <a:srgbClr val="E6F1E0"/>
+              <a:schemeClr val="tx1"/>
             </a:solidFill>
-            <a:ln>
-              <a:solidFill>
-                <a:schemeClr val="tx1"/>
-              </a:solidFill>
-            </a:ln>
-          </p:spPr>
-          <p:style>
-            <a:lnRef idx="2">
-              <a:schemeClr val="accent1">
-                <a:lumMod val="75000"/>
-              </a:schemeClr>
-            </a:lnRef>
-            <a:fillRef idx="1">
-              <a:schemeClr val="accent1"/>
-            </a:fillRef>
-            <a:effectRef idx="0">
-              <a:srgbClr val="FFFFFF"/>
-            </a:effectRef>
-            <a:fontRef idx="minor">
-              <a:schemeClr val="lt1"/>
-            </a:fontRef>
-          </p:style>
-          <p:txBody>
-            <a:bodyPr vertOverflow="overflow" horzOverflow="overflow" vert="horz" wrap="square" numCol="1" spcCol="0" rtlCol="0" fromWordArt="0" anchor="ctr" anchorCtr="0" forceAA="0" compatLnSpc="1">
-              <a:noAutofit/>
-            </a:bodyPr>
-            <a:p>
-              <a:pPr lvl="0" algn="ctr">
-                <a:buClrTx/>
-                <a:buSzTx/>
-                <a:buFontTx/>
-              </a:pPr>
-              <a:endParaRPr lang="zh-CN" altLang="en-US">
-                <a:sym typeface="+mn-ea"/>
-              </a:endParaRPr>
-            </a:p>
-          </p:txBody>
-        </p:sp>
-        <p:sp>
-          <p:nvSpPr>
-            <p:cNvPr id="13" name="矩形 12"/>
-            <p:cNvSpPr/>
-            <p:nvPr/>
-          </p:nvSpPr>
-          <p:spPr>
-            <a:xfrm>
-              <a:off x="298" y="2269"/>
-              <a:ext cx="3695" cy="885"/>
-            </a:xfrm>
-            <a:prstGeom prst="rect">
-              <a:avLst/>
-            </a:prstGeom>
+          </a:ln>
+        </p:spPr>
+        <p:style>
+          <a:lnRef idx="2">
+            <a:schemeClr val="accent1">
+              <a:lumMod val="75000"/>
+            </a:schemeClr>
+          </a:lnRef>
+          <a:fillRef idx="1">
+            <a:schemeClr val="accent1"/>
+          </a:fillRef>
+          <a:effectRef idx="0">
+            <a:srgbClr val="FFFFFF"/>
+          </a:effectRef>
+          <a:fontRef idx="minor">
+            <a:schemeClr val="lt1"/>
+          </a:fontRef>
+        </p:style>
+        <p:txBody>
+          <a:bodyPr vertOverflow="overflow" horzOverflow="overflow" vert="horz" wrap="square" numCol="1" spcCol="0" rtlCol="0" fromWordArt="0" anchor="ctr" anchorCtr="0" forceAA="0" compatLnSpc="1">
+            <a:noAutofit/>
+          </a:bodyPr>
+          <a:p>
+            <a:pPr lvl="0" algn="ctr">
+              <a:buClrTx/>
+              <a:buSzTx/>
+              <a:buFontTx/>
+            </a:pPr>
+            <a:endParaRPr lang="zh-CN" altLang="en-US">
+              <a:sym typeface="+mn-ea"/>
+            </a:endParaRPr>
+          </a:p>
+        </p:txBody>
+      </p:sp>
+      <p:sp>
+        <p:nvSpPr>
+          <p:cNvPr id="13" name="矩形 12"/>
+          <p:cNvSpPr/>
+          <p:nvPr/>
+        </p:nvSpPr>
+        <p:spPr>
+          <a:xfrm>
+            <a:off x="64135" y="118745"/>
+            <a:ext cx="2346325" cy="561975"/>
+          </a:xfrm>
+          <a:prstGeom prst="rect">
+            <a:avLst/>
+          </a:prstGeom>
+          <a:solidFill>
+            <a:srgbClr val="C5DFB2"/>
+          </a:solidFill>
+          <a:ln>
             <a:solidFill>
-              <a:srgbClr val="C5DFB2"/>
+              <a:schemeClr val="tx1"/>
             </a:solidFill>
-            <a:ln>
-              <a:solidFill>
-                <a:schemeClr val="tx1"/>
-              </a:solidFill>
-            </a:ln>
-          </p:spPr>
-          <p:style>
-            <a:lnRef idx="2">
-              <a:schemeClr val="accent1">
-                <a:lumMod val="75000"/>
-              </a:schemeClr>
-            </a:lnRef>
-            <a:fillRef idx="1">
-              <a:schemeClr val="accent1"/>
-            </a:fillRef>
-            <a:effectRef idx="0">
-              <a:srgbClr val="FFFFFF"/>
-            </a:effectRef>
-            <a:fontRef idx="minor">
-              <a:schemeClr val="lt1"/>
-            </a:fontRef>
-          </p:style>
-          <p:txBody>
-            <a:bodyPr vertOverflow="overflow" horzOverflow="overflow" vert="horz" wrap="square" numCol="1" spcCol="0" rtlCol="0" fromWordArt="0" anchor="ctr" anchorCtr="0" forceAA="0" compatLnSpc="1">
-              <a:noAutofit/>
-            </a:bodyPr>
-            <a:p>
-              <a:pPr lvl="0" algn="ctr">
-                <a:buClrTx/>
-                <a:buSzTx/>
-                <a:buFontTx/>
-              </a:pPr>
-              <a:r>
-                <a:rPr lang="zh-CN" altLang="en-US" sz="1600" b="1">
-                  <a:solidFill>
-                    <a:schemeClr val="tx1"/>
-                  </a:solidFill>
-                  <a:latin typeface="Times New Roman" panose="02020603050405020304" charset="0"/>
-                  <a:ea typeface="宋体" panose="02010600030101010101" pitchFamily="2" charset="-122"/>
-                  <a:cs typeface="Times New Roman" panose="02020603050405020304" charset="0"/>
-                  <a:sym typeface="+mn-ea"/>
-                </a:rPr>
-                <a:t>输入</a:t>
-              </a:r>
-              <a:endParaRPr lang="zh-CN" altLang="en-US" sz="1600" b="1">
+          </a:ln>
+        </p:spPr>
+        <p:style>
+          <a:lnRef idx="2">
+            <a:schemeClr val="accent1">
+              <a:lumMod val="75000"/>
+            </a:schemeClr>
+          </a:lnRef>
+          <a:fillRef idx="1">
+            <a:schemeClr val="accent1"/>
+          </a:fillRef>
+          <a:effectRef idx="0">
+            <a:srgbClr val="FFFFFF"/>
+          </a:effectRef>
+          <a:fontRef idx="minor">
+            <a:schemeClr val="lt1"/>
+          </a:fontRef>
+        </p:style>
+        <p:txBody>
+          <a:bodyPr vertOverflow="overflow" horzOverflow="overflow" vert="horz" wrap="square" numCol="1" spcCol="0" rtlCol="0" fromWordArt="0" anchor="ctr" anchorCtr="0" forceAA="0" compatLnSpc="1">
+            <a:noAutofit/>
+          </a:bodyPr>
+          <a:p>
+            <a:pPr lvl="0" algn="ctr">
+              <a:buClrTx/>
+              <a:buSzTx/>
+              <a:buFontTx/>
+            </a:pPr>
+            <a:r>
+              <a:rPr lang="zh-CN" altLang="en-US" sz="1600" b="1">
                 <a:solidFill>
                   <a:schemeClr val="tx1"/>
                 </a:solidFill>
@@ -3068,451 +3043,204 @@
                 <a:ea typeface="宋体" panose="02010600030101010101" pitchFamily="2" charset="-122"/>
                 <a:cs typeface="Times New Roman" panose="02020603050405020304" charset="0"/>
                 <a:sym typeface="+mn-ea"/>
-              </a:endParaRPr>
-            </a:p>
-          </p:txBody>
-        </p:sp>
-        <p:sp>
-          <p:nvSpPr>
-            <p:cNvPr id="4" name="圆角矩形 3"/>
-            <p:cNvSpPr/>
-            <p:nvPr/>
-          </p:nvSpPr>
-          <p:spPr>
-            <a:xfrm>
-              <a:off x="568" y="3467"/>
-              <a:ext cx="3066" cy="721"/>
-            </a:xfrm>
-            <a:prstGeom prst="roundRect">
-              <a:avLst>
-                <a:gd name="adj" fmla="val 5430"/>
-              </a:avLst>
-            </a:prstGeom>
-            <a:solidFill>
-              <a:srgbClr val="C5DEB6"/>
-            </a:solidFill>
-            <a:ln>
-              <a:noFill/>
-            </a:ln>
-          </p:spPr>
-          <p:style>
-            <a:lnRef idx="0">
-              <a:srgbClr val="FFFFFF"/>
-            </a:lnRef>
-            <a:fillRef idx="1">
-              <a:schemeClr val="accent1"/>
-            </a:fillRef>
-            <a:effectRef idx="0">
-              <a:srgbClr val="FFFFFF"/>
-            </a:effectRef>
-            <a:fontRef idx="minor">
-              <a:schemeClr val="lt1"/>
-            </a:fontRef>
-          </p:style>
-          <p:txBody>
-            <a:bodyPr vertOverflow="overflow" horzOverflow="overflow" vert="horz" wrap="square" numCol="1" spcCol="0" rtlCol="0" fromWordArt="0" anchor="ctr" anchorCtr="0" forceAA="0" compatLnSpc="1">
-              <a:noAutofit/>
-            </a:bodyPr>
-            <a:p>
-              <a:pPr lvl="0" algn="ctr">
-                <a:buClrTx/>
-                <a:buSzTx/>
-                <a:buFontTx/>
-              </a:pPr>
-              <a:r>
-                <a:rPr lang="zh-CN" altLang="en-US" sz="1600" b="1">
-                  <a:solidFill>
-                    <a:schemeClr val="tx1"/>
-                  </a:solidFill>
-                  <a:latin typeface="宋体" panose="02010600030101010101" pitchFamily="2" charset="-122"/>
-                  <a:ea typeface="宋体" panose="02010600030101010101" pitchFamily="2" charset="-122"/>
-                  <a:sym typeface="+mn-ea"/>
-                </a:rPr>
-                <a:t>动画网格</a:t>
-              </a:r>
-              <a:endParaRPr lang="zh-CN" altLang="en-US" sz="1600" b="1">
+              </a:rPr>
+              <a:t>输入</a:t>
+            </a:r>
+            <a:endParaRPr lang="zh-CN" altLang="en-US" sz="1600" b="1">
+              <a:solidFill>
+                <a:schemeClr val="tx1"/>
+              </a:solidFill>
+              <a:latin typeface="Times New Roman" panose="02020603050405020304" charset="0"/>
+              <a:ea typeface="宋体" panose="02010600030101010101" pitchFamily="2" charset="-122"/>
+              <a:cs typeface="Times New Roman" panose="02020603050405020304" charset="0"/>
+              <a:sym typeface="+mn-ea"/>
+            </a:endParaRPr>
+          </a:p>
+        </p:txBody>
+      </p:sp>
+      <p:sp>
+        <p:nvSpPr>
+          <p:cNvPr id="4" name="圆角矩形 3"/>
+          <p:cNvSpPr/>
+          <p:nvPr/>
+        </p:nvSpPr>
+        <p:spPr>
+          <a:xfrm>
+            <a:off x="235585" y="879475"/>
+            <a:ext cx="1946910" cy="457835"/>
+          </a:xfrm>
+          <a:prstGeom prst="roundRect">
+            <a:avLst>
+              <a:gd name="adj" fmla="val 5430"/>
+            </a:avLst>
+          </a:prstGeom>
+          <a:solidFill>
+            <a:srgbClr val="C5DEB6"/>
+          </a:solidFill>
+          <a:ln>
+            <a:noFill/>
+          </a:ln>
+        </p:spPr>
+        <p:style>
+          <a:lnRef idx="0">
+            <a:srgbClr val="FFFFFF"/>
+          </a:lnRef>
+          <a:fillRef idx="1">
+            <a:schemeClr val="accent1"/>
+          </a:fillRef>
+          <a:effectRef idx="0">
+            <a:srgbClr val="FFFFFF"/>
+          </a:effectRef>
+          <a:fontRef idx="minor">
+            <a:schemeClr val="lt1"/>
+          </a:fontRef>
+        </p:style>
+        <p:txBody>
+          <a:bodyPr vertOverflow="overflow" horzOverflow="overflow" vert="horz" wrap="square" numCol="1" spcCol="0" rtlCol="0" fromWordArt="0" anchor="ctr" anchorCtr="0" forceAA="0" compatLnSpc="1">
+            <a:noAutofit/>
+          </a:bodyPr>
+          <a:p>
+            <a:pPr lvl="0" algn="ctr">
+              <a:buClrTx/>
+              <a:buSzTx/>
+              <a:buFontTx/>
+            </a:pPr>
+            <a:r>
+              <a:rPr lang="zh-CN" altLang="en-US" sz="1600">
                 <a:solidFill>
                   <a:schemeClr val="tx1"/>
                 </a:solidFill>
                 <a:latin typeface="宋体" panose="02010600030101010101" pitchFamily="2" charset="-122"/>
                 <a:ea typeface="宋体" panose="02010600030101010101" pitchFamily="2" charset="-122"/>
                 <a:sym typeface="+mn-ea"/>
-              </a:endParaRPr>
-            </a:p>
-          </p:txBody>
-        </p:sp>
-        <p:sp>
-          <p:nvSpPr>
-            <p:cNvPr id="23" name="圆角矩形 22"/>
-            <p:cNvSpPr/>
-            <p:nvPr/>
-          </p:nvSpPr>
-          <p:spPr>
-            <a:xfrm>
-              <a:off x="569" y="4512"/>
-              <a:ext cx="3064" cy="721"/>
-            </a:xfrm>
-            <a:prstGeom prst="roundRect">
-              <a:avLst>
-                <a:gd name="adj" fmla="val 5430"/>
-              </a:avLst>
-            </a:prstGeom>
-            <a:solidFill>
-              <a:srgbClr val="C5DEB6"/>
-            </a:solidFill>
-            <a:ln>
-              <a:noFill/>
-            </a:ln>
-          </p:spPr>
-          <p:style>
-            <a:lnRef idx="0">
-              <a:srgbClr val="FFFFFF"/>
-            </a:lnRef>
-            <a:fillRef idx="1">
-              <a:schemeClr val="accent1"/>
-            </a:fillRef>
-            <a:effectRef idx="0">
-              <a:srgbClr val="FFFFFF"/>
-            </a:effectRef>
-            <a:fontRef idx="minor">
-              <a:schemeClr val="lt1"/>
-            </a:fontRef>
-          </p:style>
-          <p:txBody>
-            <a:bodyPr vertOverflow="overflow" horzOverflow="overflow" vert="horz" wrap="square" numCol="1" spcCol="0" rtlCol="0" fromWordArt="0" anchor="ctr" anchorCtr="0" forceAA="0" compatLnSpc="1">
-              <a:noAutofit/>
-            </a:bodyPr>
-            <a:p>
-              <a:pPr lvl="0" algn="ctr">
-                <a:buClrTx/>
-                <a:buSzTx/>
-                <a:buFontTx/>
-              </a:pPr>
-              <a:r>
-                <a:rPr lang="zh-CN" altLang="en-US" sz="1600" b="1">
-                  <a:solidFill>
-                    <a:schemeClr val="tx1"/>
-                  </a:solidFill>
-                  <a:latin typeface="宋体" panose="02010600030101010101" pitchFamily="2" charset="-122"/>
-                  <a:ea typeface="宋体" panose="02010600030101010101" pitchFamily="2" charset="-122"/>
-                  <a:sym typeface="+mn-ea"/>
-                </a:rPr>
-                <a:t>实时注视点</a:t>
-              </a:r>
-              <a:endParaRPr lang="zh-CN" altLang="en-US" sz="1600" b="1">
+              </a:rPr>
+              <a:t>动画网格</a:t>
+            </a:r>
+            <a:endParaRPr lang="zh-CN" altLang="en-US" sz="1600">
+              <a:solidFill>
+                <a:schemeClr val="tx1"/>
+              </a:solidFill>
+              <a:latin typeface="宋体" panose="02010600030101010101" pitchFamily="2" charset="-122"/>
+              <a:ea typeface="宋体" panose="02010600030101010101" pitchFamily="2" charset="-122"/>
+              <a:sym typeface="+mn-ea"/>
+            </a:endParaRPr>
+          </a:p>
+        </p:txBody>
+      </p:sp>
+      <p:sp>
+        <p:nvSpPr>
+          <p:cNvPr id="23" name="圆角矩形 22"/>
+          <p:cNvSpPr/>
+          <p:nvPr/>
+        </p:nvSpPr>
+        <p:spPr>
+          <a:xfrm>
+            <a:off x="236220" y="1543050"/>
+            <a:ext cx="1945640" cy="457835"/>
+          </a:xfrm>
+          <a:prstGeom prst="roundRect">
+            <a:avLst>
+              <a:gd name="adj" fmla="val 5430"/>
+            </a:avLst>
+          </a:prstGeom>
+          <a:solidFill>
+            <a:srgbClr val="C5DEB6"/>
+          </a:solidFill>
+          <a:ln>
+            <a:noFill/>
+          </a:ln>
+        </p:spPr>
+        <p:style>
+          <a:lnRef idx="0">
+            <a:srgbClr val="FFFFFF"/>
+          </a:lnRef>
+          <a:fillRef idx="1">
+            <a:schemeClr val="accent1"/>
+          </a:fillRef>
+          <a:effectRef idx="0">
+            <a:srgbClr val="FFFFFF"/>
+          </a:effectRef>
+          <a:fontRef idx="minor">
+            <a:schemeClr val="lt1"/>
+          </a:fontRef>
+        </p:style>
+        <p:txBody>
+          <a:bodyPr vertOverflow="overflow" horzOverflow="overflow" vert="horz" wrap="square" numCol="1" spcCol="0" rtlCol="0" fromWordArt="0" anchor="ctr" anchorCtr="0" forceAA="0" compatLnSpc="1">
+            <a:noAutofit/>
+          </a:bodyPr>
+          <a:p>
+            <a:pPr lvl="0" algn="ctr">
+              <a:buClrTx/>
+              <a:buSzTx/>
+              <a:buFontTx/>
+            </a:pPr>
+            <a:r>
+              <a:rPr lang="zh-CN" altLang="en-US" sz="1600">
                 <a:solidFill>
                   <a:schemeClr val="tx1"/>
                 </a:solidFill>
                 <a:latin typeface="宋体" panose="02010600030101010101" pitchFamily="2" charset="-122"/>
                 <a:ea typeface="宋体" panose="02010600030101010101" pitchFamily="2" charset="-122"/>
                 <a:sym typeface="+mn-ea"/>
-              </a:endParaRPr>
-            </a:p>
-          </p:txBody>
-        </p:sp>
-        <p:sp>
-          <p:nvSpPr>
-            <p:cNvPr id="24" name="圆角矩形 23"/>
-            <p:cNvSpPr/>
-            <p:nvPr/>
-          </p:nvSpPr>
-          <p:spPr>
-            <a:xfrm>
-              <a:off x="568" y="6548"/>
-              <a:ext cx="3064" cy="721"/>
-            </a:xfrm>
-            <a:prstGeom prst="roundRect">
-              <a:avLst>
-                <a:gd name="adj" fmla="val 5430"/>
-              </a:avLst>
-            </a:prstGeom>
-            <a:solidFill>
-              <a:srgbClr val="C5DEB6"/>
-            </a:solidFill>
-            <a:ln>
-              <a:noFill/>
-            </a:ln>
-          </p:spPr>
-          <p:style>
-            <a:lnRef idx="0">
-              <a:srgbClr val="FFFFFF"/>
-            </a:lnRef>
-            <a:fillRef idx="1">
-              <a:schemeClr val="accent1"/>
-            </a:fillRef>
-            <a:effectRef idx="0">
-              <a:srgbClr val="FFFFFF"/>
-            </a:effectRef>
-            <a:fontRef idx="minor">
-              <a:schemeClr val="lt1"/>
-            </a:fontRef>
-          </p:style>
-          <p:txBody>
-            <a:bodyPr vertOverflow="overflow" horzOverflow="overflow" vert="horz" wrap="square" numCol="1" spcCol="0" rtlCol="0" fromWordArt="0" anchor="ctr" anchorCtr="0" forceAA="0" compatLnSpc="1">
-              <a:noAutofit/>
-            </a:bodyPr>
-            <a:p>
-              <a:pPr algn="ctr"/>
-              <a:r>
-                <a:rPr lang="zh-CN" altLang="en-US" sz="1600" b="1">
-                  <a:solidFill>
-                    <a:schemeClr val="tx1"/>
-                  </a:solidFill>
-                  <a:latin typeface="宋体" panose="02010600030101010101" pitchFamily="2" charset="-122"/>
-                  <a:ea typeface="宋体" panose="02010600030101010101" pitchFamily="2" charset="-122"/>
-                  <a:sym typeface="+mn-ea"/>
-                </a:rPr>
-                <a:t>cas</a:t>
-              </a:r>
-              <a:r>
-                <a:rPr lang="zh-CN" altLang="en-US" sz="1600" b="1">
-                  <a:solidFill>
-                    <a:schemeClr val="tx1"/>
-                  </a:solidFill>
-                  <a:latin typeface="宋体" panose="02010600030101010101" pitchFamily="2" charset="-122"/>
-                  <a:ea typeface="宋体" panose="02010600030101010101" pitchFamily="2" charset="-122"/>
-                  <a:sym typeface="+mn-ea"/>
-                </a:rPr>
-                <a:t>tleCSF-TS模型</a:t>
-              </a:r>
-              <a:endParaRPr lang="zh-CN" altLang="en-US" sz="1600" b="1">
-                <a:solidFill>
-                  <a:schemeClr val="tx1"/>
-                </a:solidFill>
-                <a:latin typeface="宋体" panose="02010600030101010101" pitchFamily="2" charset="-122"/>
-                <a:ea typeface="宋体" panose="02010600030101010101" pitchFamily="2" charset="-122"/>
-                <a:sym typeface="+mn-ea"/>
-              </a:endParaRPr>
-            </a:p>
-          </p:txBody>
-        </p:sp>
-        <p:sp>
-          <p:nvSpPr>
-            <p:cNvPr id="25" name="圆角矩形 24"/>
-            <p:cNvSpPr/>
-            <p:nvPr/>
-          </p:nvSpPr>
-          <p:spPr>
-            <a:xfrm>
-              <a:off x="570" y="5640"/>
-              <a:ext cx="3064" cy="721"/>
-            </a:xfrm>
-            <a:prstGeom prst="roundRect">
-              <a:avLst>
-                <a:gd name="adj" fmla="val 5430"/>
-              </a:avLst>
-            </a:prstGeom>
-            <a:solidFill>
-              <a:srgbClr val="C5DEB6"/>
-            </a:solidFill>
-            <a:ln>
-              <a:noFill/>
-            </a:ln>
-          </p:spPr>
-          <p:style>
-            <a:lnRef idx="0">
-              <a:srgbClr val="FFFFFF"/>
-            </a:lnRef>
-            <a:fillRef idx="1">
-              <a:schemeClr val="accent1"/>
-            </a:fillRef>
-            <a:effectRef idx="0">
-              <a:srgbClr val="FFFFFF"/>
-            </a:effectRef>
-            <a:fontRef idx="minor">
-              <a:schemeClr val="lt1"/>
-            </a:fontRef>
-          </p:style>
-          <p:txBody>
-            <a:bodyPr vertOverflow="overflow" horzOverflow="overflow" vert="horz" wrap="square" numCol="1" spcCol="0" rtlCol="0" fromWordArt="0" anchor="ctr" anchorCtr="0" forceAA="0" compatLnSpc="1">
-              <a:noAutofit/>
-            </a:bodyPr>
-            <a:p>
-              <a:pPr algn="ctr"/>
-              <a:r>
-                <a:rPr lang="en-US" altLang="zh-CN" sz="1600" b="1">
-                  <a:solidFill>
-                    <a:schemeClr val="tx1"/>
-                  </a:solidFill>
-                  <a:latin typeface="宋体" panose="02010600030101010101" pitchFamily="2" charset="-122"/>
-                  <a:ea typeface="宋体" panose="02010600030101010101" pitchFamily="2" charset="-122"/>
-                  <a:sym typeface="+mn-ea"/>
-                </a:rPr>
-                <a:t>LOD</a:t>
-              </a:r>
-              <a:r>
-                <a:rPr lang="zh-CN" altLang="en-US" sz="1600" b="1">
-                  <a:solidFill>
-                    <a:schemeClr val="tx1"/>
-                  </a:solidFill>
-                  <a:latin typeface="宋体" panose="02010600030101010101" pitchFamily="2" charset="-122"/>
-                  <a:ea typeface="宋体" panose="02010600030101010101" pitchFamily="2" charset="-122"/>
-                  <a:sym typeface="+mn-ea"/>
-                </a:rPr>
-                <a:t>层级</a:t>
-              </a:r>
-              <a:endParaRPr lang="zh-CN" altLang="en-US" sz="1600" b="1">
-                <a:solidFill>
-                  <a:schemeClr val="tx1"/>
-                </a:solidFill>
-                <a:latin typeface="宋体" panose="02010600030101010101" pitchFamily="2" charset="-122"/>
-                <a:ea typeface="宋体" panose="02010600030101010101" pitchFamily="2" charset="-122"/>
-                <a:sym typeface="+mn-ea"/>
-              </a:endParaRPr>
-            </a:p>
-          </p:txBody>
-        </p:sp>
-        <p:sp>
-          <p:nvSpPr>
-            <p:cNvPr id="26" name="圆角矩形 25"/>
-            <p:cNvSpPr/>
-            <p:nvPr/>
-          </p:nvSpPr>
-          <p:spPr>
-            <a:xfrm>
-              <a:off x="570" y="7617"/>
-              <a:ext cx="3064" cy="721"/>
-            </a:xfrm>
-            <a:prstGeom prst="roundRect">
-              <a:avLst>
-                <a:gd name="adj" fmla="val 5430"/>
-              </a:avLst>
-            </a:prstGeom>
-            <a:solidFill>
-              <a:srgbClr val="C5DEB6"/>
-            </a:solidFill>
-            <a:ln>
-              <a:noFill/>
-            </a:ln>
-          </p:spPr>
-          <p:style>
-            <a:lnRef idx="0">
-              <a:srgbClr val="FFFFFF"/>
-            </a:lnRef>
-            <a:fillRef idx="1">
-              <a:schemeClr val="accent1"/>
-            </a:fillRef>
-            <a:effectRef idx="0">
-              <a:srgbClr val="FFFFFF"/>
-            </a:effectRef>
-            <a:fontRef idx="minor">
-              <a:schemeClr val="lt1"/>
-            </a:fontRef>
-          </p:style>
-          <p:txBody>
-            <a:bodyPr vertOverflow="overflow" horzOverflow="overflow" vert="horz" wrap="square" numCol="1" spcCol="0" rtlCol="0" fromWordArt="0" anchor="ctr" anchorCtr="0" forceAA="0" compatLnSpc="1">
-              <a:noAutofit/>
-            </a:bodyPr>
-            <a:p>
-              <a:pPr algn="ctr"/>
-              <a:r>
-                <a:rPr lang="zh-CN" altLang="en-US" sz="1600" b="1">
-                  <a:solidFill>
-                    <a:schemeClr val="tx1"/>
-                  </a:solidFill>
-                  <a:latin typeface="宋体" panose="02010600030101010101" pitchFamily="2" charset="-122"/>
-                  <a:ea typeface="宋体" panose="02010600030101010101" pitchFamily="2" charset="-122"/>
-                  <a:sym typeface="+mn-ea"/>
-                </a:rPr>
-                <a:t>偏心度阈值</a:t>
-              </a:r>
-              <a:endParaRPr lang="zh-CN" altLang="en-US" sz="1600" b="1">
-                <a:solidFill>
-                  <a:schemeClr val="tx1"/>
-                </a:solidFill>
-                <a:latin typeface="宋体" panose="02010600030101010101" pitchFamily="2" charset="-122"/>
-                <a:ea typeface="宋体" panose="02010600030101010101" pitchFamily="2" charset="-122"/>
-                <a:sym typeface="+mn-ea"/>
-              </a:endParaRPr>
-            </a:p>
-          </p:txBody>
-        </p:sp>
-        <p:sp>
-          <p:nvSpPr>
-            <p:cNvPr id="28" name="矩形 27"/>
-            <p:cNvSpPr/>
-            <p:nvPr/>
-          </p:nvSpPr>
-          <p:spPr>
-            <a:xfrm>
-              <a:off x="4827" y="2269"/>
-              <a:ext cx="1180" cy="6541"/>
-            </a:xfrm>
-            <a:prstGeom prst="rect">
-              <a:avLst/>
-            </a:prstGeom>
-            <a:solidFill>
-              <a:srgbClr val="C5DFB2"/>
-            </a:solidFill>
-            <a:ln>
+              </a:rPr>
+              <a:t>实时注视点</a:t>
+            </a:r>
+            <a:endParaRPr lang="zh-CN" altLang="en-US" sz="1600">
               <a:solidFill>
                 <a:schemeClr val="tx1"/>
               </a:solidFill>
-            </a:ln>
-          </p:spPr>
-          <p:style>
-            <a:lnRef idx="2">
-              <a:schemeClr val="accent1">
-                <a:lumMod val="75000"/>
-              </a:schemeClr>
-            </a:lnRef>
-            <a:fillRef idx="1">
-              <a:schemeClr val="accent1"/>
-            </a:fillRef>
-            <a:effectRef idx="0">
-              <a:srgbClr val="FFFFFF"/>
-            </a:effectRef>
-            <a:fontRef idx="minor">
-              <a:schemeClr val="lt1"/>
-            </a:fontRef>
-          </p:style>
-          <p:txBody>
-            <a:bodyPr vertOverflow="overflow" horzOverflow="overflow" vert="horz" wrap="square" numCol="1" spcCol="0" rtlCol="0" fromWordArt="0" anchor="ctr" anchorCtr="0" forceAA="0" compatLnSpc="1">
-              <a:noAutofit/>
-            </a:bodyPr>
-            <a:p>
-              <a:pPr lvl="0" algn="ctr">
-                <a:buClrTx/>
-                <a:buSzTx/>
-                <a:buFontTx/>
-              </a:pPr>
-              <a:r>
-                <a:rPr lang="zh-CN" altLang="en-US" sz="1600" b="1">
-                  <a:solidFill>
-                    <a:schemeClr val="tx1"/>
-                  </a:solidFill>
-                  <a:latin typeface="Times New Roman" panose="02020603050405020304" charset="0"/>
-                  <a:ea typeface="宋体" panose="02010600030101010101" pitchFamily="2" charset="-122"/>
-                  <a:cs typeface="Times New Roman" panose="02020603050405020304" charset="0"/>
-                  <a:sym typeface="+mn-ea"/>
-                </a:rPr>
-                <a:t>基础</a:t>
-              </a:r>
-              <a:r>
-                <a:rPr lang="en-US" altLang="zh-CN" sz="1600" b="1">
-                  <a:solidFill>
-                    <a:schemeClr val="tx1"/>
-                  </a:solidFill>
-                  <a:latin typeface="Times New Roman" panose="02020603050405020304" charset="0"/>
-                  <a:ea typeface="宋体" panose="02010600030101010101" pitchFamily="2" charset="-122"/>
-                  <a:cs typeface="Times New Roman" panose="02020603050405020304" charset="0"/>
-                  <a:sym typeface="+mn-ea"/>
-                </a:rPr>
-                <a:t>LOD</a:t>
-              </a:r>
-              <a:r>
-                <a:rPr lang="zh-CN" altLang="en-US" sz="1600" b="1">
-                  <a:solidFill>
-                    <a:schemeClr val="tx1"/>
-                  </a:solidFill>
-                  <a:latin typeface="Times New Roman" panose="02020603050405020304" charset="0"/>
-                  <a:ea typeface="宋体" panose="02010600030101010101" pitchFamily="2" charset="-122"/>
-                  <a:cs typeface="Times New Roman" panose="02020603050405020304" charset="0"/>
-                  <a:sym typeface="+mn-ea"/>
-                </a:rPr>
-                <a:t>层级</a:t>
-              </a:r>
-              <a:endParaRPr lang="en-US" altLang="zh-CN" sz="1600" b="1">
+              <a:latin typeface="宋体" panose="02010600030101010101" pitchFamily="2" charset="-122"/>
+              <a:ea typeface="宋体" panose="02010600030101010101" pitchFamily="2" charset="-122"/>
+              <a:sym typeface="+mn-ea"/>
+            </a:endParaRPr>
+          </a:p>
+        </p:txBody>
+      </p:sp>
+      <p:sp>
+        <p:nvSpPr>
+          <p:cNvPr id="24" name="圆角矩形 23"/>
+          <p:cNvSpPr/>
+          <p:nvPr/>
+        </p:nvSpPr>
+        <p:spPr>
+          <a:xfrm>
+            <a:off x="235585" y="2835910"/>
+            <a:ext cx="1945640" cy="457835"/>
+          </a:xfrm>
+          <a:prstGeom prst="roundRect">
+            <a:avLst>
+              <a:gd name="adj" fmla="val 5430"/>
+            </a:avLst>
+          </a:prstGeom>
+          <a:solidFill>
+            <a:srgbClr val="C5DEB6"/>
+          </a:solidFill>
+          <a:ln>
+            <a:noFill/>
+          </a:ln>
+        </p:spPr>
+        <p:style>
+          <a:lnRef idx="0">
+            <a:srgbClr val="FFFFFF"/>
+          </a:lnRef>
+          <a:fillRef idx="1">
+            <a:schemeClr val="accent1"/>
+          </a:fillRef>
+          <a:effectRef idx="0">
+            <a:srgbClr val="FFFFFF"/>
+          </a:effectRef>
+          <a:fontRef idx="minor">
+            <a:schemeClr val="lt1"/>
+          </a:fontRef>
+        </p:style>
+        <p:txBody>
+          <a:bodyPr vertOverflow="overflow" horzOverflow="overflow" vert="horz" wrap="square" numCol="1" spcCol="0" rtlCol="0" fromWordArt="0" anchor="ctr" anchorCtr="0" forceAA="0" compatLnSpc="1">
+            <a:noAutofit/>
+          </a:bodyPr>
+          <a:p>
+            <a:pPr algn="ctr"/>
+            <a:r>
+              <a:rPr lang="zh-CN" altLang="en-US" sz="1600">
                 <a:solidFill>
                   <a:schemeClr val="tx1"/>
                 </a:solidFill>
@@ -3520,39 +3248,76 @@
                 <a:ea typeface="宋体" panose="02010600030101010101" pitchFamily="2" charset="-122"/>
                 <a:cs typeface="Times New Roman" panose="02020603050405020304" charset="0"/>
                 <a:sym typeface="+mn-ea"/>
-              </a:endParaRPr>
-            </a:p>
-            <a:p>
-              <a:pPr lvl="0" algn="ctr">
-                <a:buClrTx/>
-                <a:buSzTx/>
-                <a:buFontTx/>
-              </a:pPr>
-              <a:r>
-                <a:rPr lang="zh-CN" altLang="en-US" sz="1600" b="1">
-                  <a:solidFill>
-                    <a:schemeClr val="tx1"/>
-                  </a:solidFill>
-                  <a:latin typeface="Times New Roman" panose="02020603050405020304" charset="0"/>
-                  <a:ea typeface="宋体" panose="02010600030101010101" pitchFamily="2" charset="-122"/>
-                  <a:cs typeface="Times New Roman" panose="02020603050405020304" charset="0"/>
-                  <a:sym typeface="+mn-ea"/>
-                </a:rPr>
-                <a:t>选</a:t>
-              </a:r>
-              <a:r>
-                <a:rPr lang="zh-CN" altLang="en-US" sz="1600" b="1">
-                  <a:solidFill>
-                    <a:schemeClr val="tx1"/>
-                  </a:solidFill>
-                  <a:latin typeface="Times New Roman" panose="02020603050405020304" charset="0"/>
-                  <a:ea typeface="宋体" panose="02010600030101010101" pitchFamily="2" charset="-122"/>
-                  <a:cs typeface="Times New Roman" panose="02020603050405020304" charset="0"/>
-                  <a:sym typeface="+mn-ea"/>
-                </a:rPr>
-                <a:t>择</a:t>
-              </a:r>
-              <a:endParaRPr lang="zh-CN" altLang="en-US" sz="1600" b="1">
+              </a:rPr>
+              <a:t>castleCSF-TS</a:t>
+            </a:r>
+            <a:r>
+              <a:rPr lang="zh-CN" altLang="en-US" sz="1600">
+                <a:solidFill>
+                  <a:schemeClr val="tx1"/>
+                </a:solidFill>
+                <a:latin typeface="宋体" panose="02010600030101010101" pitchFamily="2" charset="-122"/>
+                <a:ea typeface="宋体" panose="02010600030101010101" pitchFamily="2" charset="-122"/>
+                <a:sym typeface="+mn-ea"/>
+              </a:rPr>
+              <a:t>模型</a:t>
+            </a:r>
+            <a:endParaRPr lang="zh-CN" altLang="en-US" sz="1600">
+              <a:solidFill>
+                <a:schemeClr val="tx1"/>
+              </a:solidFill>
+              <a:latin typeface="宋体" panose="02010600030101010101" pitchFamily="2" charset="-122"/>
+              <a:ea typeface="宋体" panose="02010600030101010101" pitchFamily="2" charset="-122"/>
+              <a:sym typeface="+mn-ea"/>
+            </a:endParaRPr>
+          </a:p>
+        </p:txBody>
+      </p:sp>
+      <p:sp>
+        <p:nvSpPr>
+          <p:cNvPr id="25" name="圆角矩形 24"/>
+          <p:cNvSpPr/>
+          <p:nvPr/>
+        </p:nvSpPr>
+        <p:spPr>
+          <a:xfrm>
+            <a:off x="236855" y="2259330"/>
+            <a:ext cx="1945640" cy="457835"/>
+          </a:xfrm>
+          <a:prstGeom prst="roundRect">
+            <a:avLst>
+              <a:gd name="adj" fmla="val 5430"/>
+            </a:avLst>
+          </a:prstGeom>
+          <a:solidFill>
+            <a:srgbClr val="C5DEB6"/>
+          </a:solidFill>
+          <a:ln>
+            <a:noFill/>
+          </a:ln>
+        </p:spPr>
+        <p:style>
+          <a:lnRef idx="0">
+            <a:srgbClr val="FFFFFF"/>
+          </a:lnRef>
+          <a:fillRef idx="1">
+            <a:schemeClr val="accent1"/>
+          </a:fillRef>
+          <a:effectRef idx="0">
+            <a:srgbClr val="FFFFFF"/>
+          </a:effectRef>
+          <a:fontRef idx="minor">
+            <a:schemeClr val="lt1"/>
+          </a:fontRef>
+        </p:style>
+        <p:txBody>
+          <a:bodyPr vertOverflow="overflow" horzOverflow="overflow" vert="horz" wrap="square" numCol="1" spcCol="0" rtlCol="0" fromWordArt="0" anchor="ctr" anchorCtr="0" forceAA="0" compatLnSpc="1">
+            <a:noAutofit/>
+          </a:bodyPr>
+          <a:p>
+            <a:pPr algn="ctr"/>
+            <a:r>
+              <a:rPr lang="en-US" altLang="zh-CN" sz="1600">
                 <a:solidFill>
                   <a:schemeClr val="tx1"/>
                 </a:solidFill>
@@ -3560,72 +3325,147 @@
                 <a:ea typeface="宋体" panose="02010600030101010101" pitchFamily="2" charset="-122"/>
                 <a:cs typeface="Times New Roman" panose="02020603050405020304" charset="0"/>
                 <a:sym typeface="+mn-ea"/>
-              </a:endParaRPr>
-            </a:p>
-          </p:txBody>
-        </p:sp>
-        <p:sp>
-          <p:nvSpPr>
-            <p:cNvPr id="29" name="矩形 28"/>
-            <p:cNvSpPr/>
-            <p:nvPr/>
-          </p:nvSpPr>
-          <p:spPr>
-            <a:xfrm>
-              <a:off x="6984" y="2269"/>
-              <a:ext cx="1386" cy="6541"/>
-            </a:xfrm>
-            <a:prstGeom prst="rect">
-              <a:avLst/>
-            </a:prstGeom>
-            <a:solidFill>
-              <a:srgbClr val="C5DFB2"/>
-            </a:solidFill>
-            <a:ln>
+              </a:rPr>
+              <a:t>LOD</a:t>
+            </a:r>
+            <a:r>
+              <a:rPr lang="zh-CN" altLang="en-US" sz="1600">
+                <a:solidFill>
+                  <a:schemeClr val="tx1"/>
+                </a:solidFill>
+                <a:latin typeface="宋体" panose="02010600030101010101" pitchFamily="2" charset="-122"/>
+                <a:ea typeface="宋体" panose="02010600030101010101" pitchFamily="2" charset="-122"/>
+                <a:sym typeface="+mn-ea"/>
+              </a:rPr>
+              <a:t>层级</a:t>
+            </a:r>
+            <a:endParaRPr lang="zh-CN" altLang="en-US" sz="1600">
               <a:solidFill>
                 <a:schemeClr val="tx1"/>
               </a:solidFill>
-            </a:ln>
-          </p:spPr>
-          <p:style>
-            <a:lnRef idx="2">
-              <a:schemeClr val="accent1">
-                <a:lumMod val="75000"/>
-              </a:schemeClr>
-            </a:lnRef>
-            <a:fillRef idx="1">
-              <a:schemeClr val="accent1"/>
-            </a:fillRef>
-            <a:effectRef idx="0">
-              <a:srgbClr val="FFFFFF"/>
-            </a:effectRef>
-            <a:fontRef idx="minor">
-              <a:schemeClr val="lt1"/>
-            </a:fontRef>
-          </p:style>
-          <p:txBody>
-            <a:bodyPr vertOverflow="overflow" horzOverflow="overflow" vert="horz" wrap="square" numCol="1" spcCol="0" rtlCol="0" fromWordArt="0" anchor="ctr" anchorCtr="0" forceAA="0" compatLnSpc="1">
-              <a:noAutofit/>
-            </a:bodyPr>
-            <a:p>
-              <a:pPr lvl="0" algn="ctr">
-                <a:buClrTx/>
-                <a:buSzTx/>
-                <a:buFontTx/>
-              </a:pPr>
-              <a:r>
-                <a:rPr lang="zh-CN" sz="1600" b="1">
-                  <a:solidFill>
-                    <a:schemeClr val="tx1"/>
-                  </a:solidFill>
-                  <a:latin typeface="Times New Roman" panose="02020603050405020304" charset="0"/>
-                  <a:ea typeface="宋体" panose="02010600030101010101" pitchFamily="2" charset="-122"/>
-                  <a:cs typeface="Times New Roman" panose="02020603050405020304" charset="0"/>
-                  <a:sym typeface="+mn-ea"/>
-                </a:rPr>
-                <a:t>感知驱动细分因子计算</a:t>
-              </a:r>
-              <a:endParaRPr lang="zh-CN" sz="1600" b="1">
+              <a:latin typeface="宋体" panose="02010600030101010101" pitchFamily="2" charset="-122"/>
+              <a:ea typeface="宋体" panose="02010600030101010101" pitchFamily="2" charset="-122"/>
+              <a:sym typeface="+mn-ea"/>
+            </a:endParaRPr>
+          </a:p>
+        </p:txBody>
+      </p:sp>
+      <p:sp>
+        <p:nvSpPr>
+          <p:cNvPr id="26" name="圆角矩形 25"/>
+          <p:cNvSpPr/>
+          <p:nvPr/>
+        </p:nvSpPr>
+        <p:spPr>
+          <a:xfrm>
+            <a:off x="236855" y="3514725"/>
+            <a:ext cx="1945640" cy="457835"/>
+          </a:xfrm>
+          <a:prstGeom prst="roundRect">
+            <a:avLst>
+              <a:gd name="adj" fmla="val 5430"/>
+            </a:avLst>
+          </a:prstGeom>
+          <a:solidFill>
+            <a:srgbClr val="C5DEB6"/>
+          </a:solidFill>
+          <a:ln>
+            <a:noFill/>
+          </a:ln>
+        </p:spPr>
+        <p:style>
+          <a:lnRef idx="0">
+            <a:srgbClr val="FFFFFF"/>
+          </a:lnRef>
+          <a:fillRef idx="1">
+            <a:schemeClr val="accent1"/>
+          </a:fillRef>
+          <a:effectRef idx="0">
+            <a:srgbClr val="FFFFFF"/>
+          </a:effectRef>
+          <a:fontRef idx="minor">
+            <a:schemeClr val="lt1"/>
+          </a:fontRef>
+        </p:style>
+        <p:txBody>
+          <a:bodyPr vertOverflow="overflow" horzOverflow="overflow" vert="horz" wrap="square" numCol="1" spcCol="0" rtlCol="0" fromWordArt="0" anchor="ctr" anchorCtr="0" forceAA="0" compatLnSpc="1">
+            <a:noAutofit/>
+          </a:bodyPr>
+          <a:p>
+            <a:pPr algn="ctr"/>
+            <a:r>
+              <a:rPr lang="zh-CN" altLang="en-US" sz="1600">
+                <a:solidFill>
+                  <a:schemeClr val="tx1"/>
+                </a:solidFill>
+                <a:latin typeface="宋体" panose="02010600030101010101" pitchFamily="2" charset="-122"/>
+                <a:ea typeface="宋体" panose="02010600030101010101" pitchFamily="2" charset="-122"/>
+                <a:sym typeface="+mn-ea"/>
+              </a:rPr>
+              <a:t>偏心度阈值</a:t>
+            </a:r>
+            <a:endParaRPr lang="zh-CN" altLang="en-US" sz="1600">
+              <a:solidFill>
+                <a:schemeClr val="tx1"/>
+              </a:solidFill>
+              <a:latin typeface="宋体" panose="02010600030101010101" pitchFamily="2" charset="-122"/>
+              <a:ea typeface="宋体" panose="02010600030101010101" pitchFamily="2" charset="-122"/>
+              <a:sym typeface="+mn-ea"/>
+            </a:endParaRPr>
+          </a:p>
+        </p:txBody>
+      </p:sp>
+      <p:sp>
+        <p:nvSpPr>
+          <p:cNvPr id="28" name="矩形 27"/>
+          <p:cNvSpPr/>
+          <p:nvPr/>
+        </p:nvSpPr>
+        <p:spPr>
+          <a:xfrm>
+            <a:off x="2940050" y="118745"/>
+            <a:ext cx="749300" cy="4153535"/>
+          </a:xfrm>
+          <a:prstGeom prst="rect">
+            <a:avLst/>
+          </a:prstGeom>
+          <a:solidFill>
+            <a:srgbClr val="C5DFB2"/>
+          </a:solidFill>
+          <a:ln>
+            <a:solidFill>
+              <a:schemeClr val="tx1"/>
+            </a:solidFill>
+          </a:ln>
+        </p:spPr>
+        <p:style>
+          <a:lnRef idx="2">
+            <a:schemeClr val="accent1">
+              <a:lumMod val="75000"/>
+            </a:schemeClr>
+          </a:lnRef>
+          <a:fillRef idx="1">
+            <a:schemeClr val="accent1"/>
+          </a:fillRef>
+          <a:effectRef idx="0">
+            <a:srgbClr val="FFFFFF"/>
+          </a:effectRef>
+          <a:fontRef idx="minor">
+            <a:schemeClr val="lt1"/>
+          </a:fontRef>
+        </p:style>
+        <p:txBody>
+          <a:bodyPr vertOverflow="overflow" horzOverflow="overflow" vert="horz" wrap="square" numCol="1" spcCol="0" rtlCol="0" fromWordArt="0" anchor="ctr" anchorCtr="0" forceAA="0" compatLnSpc="1">
+            <a:noAutofit/>
+          </a:bodyPr>
+          <a:p>
+            <a:pPr lvl="0" algn="ctr">
+              <a:buClrTx/>
+              <a:buSzTx/>
+              <a:buFontTx/>
+            </a:pPr>
+            <a:r>
+              <a:rPr lang="zh-CN" altLang="en-US" sz="1600">
                 <a:solidFill>
                   <a:schemeClr val="tx1"/>
                 </a:solidFill>
@@ -3633,84 +3473,11 @@
                 <a:ea typeface="宋体" panose="02010600030101010101" pitchFamily="2" charset="-122"/>
                 <a:cs typeface="Times New Roman" panose="02020603050405020304" charset="0"/>
                 <a:sym typeface="+mn-ea"/>
-              </a:endParaRPr>
-            </a:p>
-          </p:txBody>
-        </p:sp>
-        <p:sp>
-          <p:nvSpPr>
-            <p:cNvPr id="30" name="矩形 29"/>
-            <p:cNvSpPr/>
-            <p:nvPr/>
-          </p:nvSpPr>
-          <p:spPr>
-            <a:xfrm>
-              <a:off x="9339" y="2269"/>
-              <a:ext cx="1180" cy="6541"/>
-            </a:xfrm>
-            <a:prstGeom prst="rect">
-              <a:avLst/>
-            </a:prstGeom>
-            <a:solidFill>
-              <a:srgbClr val="C5DFB2"/>
-            </a:solidFill>
-            <a:ln>
-              <a:solidFill>
-                <a:schemeClr val="tx1"/>
-              </a:solidFill>
-            </a:ln>
-          </p:spPr>
-          <p:style>
-            <a:lnRef idx="2">
-              <a:schemeClr val="accent1">
-                <a:lumMod val="75000"/>
-              </a:schemeClr>
-            </a:lnRef>
-            <a:fillRef idx="1">
-              <a:schemeClr val="accent1"/>
-            </a:fillRef>
-            <a:effectRef idx="0">
-              <a:srgbClr val="FFFFFF"/>
-            </a:effectRef>
-            <a:fontRef idx="minor">
-              <a:schemeClr val="lt1"/>
-            </a:fontRef>
-          </p:style>
-          <p:txBody>
-            <a:bodyPr vertOverflow="overflow" horzOverflow="overflow" vert="horz" wrap="square" numCol="1" spcCol="0" rtlCol="0" fromWordArt="0" anchor="ctr" anchorCtr="0" forceAA="0" compatLnSpc="1">
-              <a:noAutofit/>
-            </a:bodyPr>
-            <a:p>
-              <a:pPr lvl="0" algn="ctr">
-                <a:buClrTx/>
-                <a:buSzTx/>
-                <a:buFontTx/>
-              </a:pPr>
-              <a:r>
-                <a:rPr lang="en-US" altLang="zh-CN" sz="1600" b="1">
-                  <a:solidFill>
-                    <a:schemeClr val="tx1"/>
-                  </a:solidFill>
-                  <a:latin typeface="Times New Roman" panose="02020603050405020304" charset="0"/>
-                  <a:ea typeface="宋体" panose="02010600030101010101" pitchFamily="2" charset="-122"/>
-                  <a:cs typeface="Times New Roman" panose="02020603050405020304" charset="0"/>
-                  <a:sym typeface="+mn-ea"/>
-                </a:rPr>
-                <a:t>GPU</a:t>
-              </a:r>
-              <a:r>
-                <a:rPr lang="zh-CN" altLang="en-US" sz="1600" b="1">
-                  <a:solidFill>
-                    <a:schemeClr val="tx1"/>
-                  </a:solidFill>
-                  <a:latin typeface="Times New Roman" panose="02020603050405020304" charset="0"/>
-                  <a:ea typeface="宋体" panose="02010600030101010101" pitchFamily="2" charset="-122"/>
-                  <a:cs typeface="Times New Roman" panose="02020603050405020304" charset="0"/>
-                  <a:sym typeface="+mn-ea"/>
-                </a:rPr>
-                <a:t>自适应镶嵌细分</a:t>
-              </a:r>
-              <a:endParaRPr lang="zh-CN" altLang="en-US" sz="1600" b="1">
+              </a:rPr>
+              <a:t>基础</a:t>
+            </a:r>
+            <a:r>
+              <a:rPr lang="en-US" altLang="zh-CN" sz="1600">
                 <a:solidFill>
                   <a:schemeClr val="tx1"/>
                 </a:solidFill>
@@ -3718,72 +3485,11 @@
                 <a:ea typeface="宋体" panose="02010600030101010101" pitchFamily="2" charset="-122"/>
                 <a:cs typeface="Times New Roman" panose="02020603050405020304" charset="0"/>
                 <a:sym typeface="+mn-ea"/>
-              </a:endParaRPr>
-            </a:p>
-          </p:txBody>
-        </p:sp>
-        <p:sp>
-          <p:nvSpPr>
-            <p:cNvPr id="33" name="矩形 32"/>
-            <p:cNvSpPr/>
-            <p:nvPr/>
-          </p:nvSpPr>
-          <p:spPr>
-            <a:xfrm>
-              <a:off x="11668" y="2270"/>
-              <a:ext cx="1140" cy="6541"/>
-            </a:xfrm>
-            <a:prstGeom prst="rect">
-              <a:avLst/>
-            </a:prstGeom>
-            <a:solidFill>
-              <a:srgbClr val="C5DFB2"/>
-            </a:solidFill>
-            <a:ln>
-              <a:solidFill>
-                <a:schemeClr val="tx1"/>
-              </a:solidFill>
-            </a:ln>
-          </p:spPr>
-          <p:style>
-            <a:lnRef idx="2">
-              <a:schemeClr val="accent1">
-                <a:lumMod val="75000"/>
-              </a:schemeClr>
-            </a:lnRef>
-            <a:fillRef idx="1">
-              <a:schemeClr val="accent1"/>
-            </a:fillRef>
-            <a:effectRef idx="0">
-              <a:srgbClr val="FFFFFF"/>
-            </a:effectRef>
-            <a:fontRef idx="minor">
-              <a:schemeClr val="lt1"/>
-            </a:fontRef>
-          </p:style>
-          <p:txBody>
-            <a:bodyPr vertOverflow="overflow" horzOverflow="overflow" vert="horz" wrap="square" numCol="1" spcCol="0" rtlCol="0" fromWordArt="0" anchor="ctr" anchorCtr="0" forceAA="0" compatLnSpc="1">
-              <a:noAutofit/>
-            </a:bodyPr>
-            <a:p>
-              <a:pPr lvl="0" algn="ctr">
-                <a:buClrTx/>
-                <a:buSzTx/>
-                <a:buFontTx/>
-              </a:pPr>
-              <a:r>
-                <a:rPr lang="zh-CN" sz="1600" b="1">
-                  <a:solidFill>
-                    <a:schemeClr val="tx1"/>
-                  </a:solidFill>
-                  <a:latin typeface="Times New Roman" panose="02020603050405020304" charset="0"/>
-                  <a:ea typeface="宋体" panose="02010600030101010101" pitchFamily="2" charset="-122"/>
-                  <a:cs typeface="Times New Roman" panose="02020603050405020304" charset="0"/>
-                  <a:sym typeface="+mn-ea"/>
-                </a:rPr>
-                <a:t>纹理与过渡处理</a:t>
-              </a:r>
-              <a:endParaRPr lang="zh-CN" sz="1600" b="1">
+              </a:rPr>
+              <a:t>LOD</a:t>
+            </a:r>
+            <a:r>
+              <a:rPr lang="zh-CN" altLang="en-US" sz="1600">
                 <a:solidFill>
                   <a:schemeClr val="tx1"/>
                 </a:solidFill>
@@ -3791,127 +3497,27 @@
                 <a:ea typeface="宋体" panose="02010600030101010101" pitchFamily="2" charset="-122"/>
                 <a:cs typeface="Times New Roman" panose="02020603050405020304" charset="0"/>
                 <a:sym typeface="+mn-ea"/>
-              </a:endParaRPr>
-            </a:p>
-          </p:txBody>
-        </p:sp>
-        <p:sp>
-          <p:nvSpPr>
-            <p:cNvPr id="34" name="矩形 33"/>
-            <p:cNvSpPr/>
-            <p:nvPr/>
-          </p:nvSpPr>
-          <p:spPr>
-            <a:xfrm>
-              <a:off x="13994" y="3155"/>
-              <a:ext cx="3694" cy="5657"/>
-            </a:xfrm>
-            <a:prstGeom prst="rect">
-              <a:avLst/>
-            </a:prstGeom>
-            <a:solidFill>
-              <a:srgbClr val="E6F1E0"/>
-            </a:solidFill>
-            <a:ln>
+              </a:rPr>
+              <a:t>层级</a:t>
+            </a:r>
+            <a:endParaRPr lang="en-US" altLang="zh-CN" sz="1600">
               <a:solidFill>
                 <a:schemeClr val="tx1"/>
               </a:solidFill>
-            </a:ln>
-          </p:spPr>
-          <p:style>
-            <a:lnRef idx="2">
-              <a:schemeClr val="accent1">
-                <a:lumMod val="75000"/>
-              </a:schemeClr>
-            </a:lnRef>
-            <a:fillRef idx="1">
-              <a:schemeClr val="accent1"/>
-            </a:fillRef>
-            <a:effectRef idx="0">
-              <a:srgbClr val="FFFFFF"/>
-            </a:effectRef>
-            <a:fontRef idx="minor">
-              <a:schemeClr val="lt1"/>
-            </a:fontRef>
-          </p:style>
-          <p:txBody>
-            <a:bodyPr vertOverflow="overflow" horzOverflow="overflow" vert="horz" wrap="square" numCol="1" spcCol="0" rtlCol="0" fromWordArt="0" anchor="ctr" anchorCtr="0" forceAA="0" compatLnSpc="1">
-              <a:noAutofit/>
-            </a:bodyPr>
-            <a:p>
-              <a:pPr lvl="0" algn="ctr">
-                <a:buClrTx/>
-                <a:buSzTx/>
-                <a:buFontTx/>
-              </a:pPr>
-              <a:endParaRPr lang="zh-CN" altLang="en-US">
-                <a:sym typeface="+mn-ea"/>
-              </a:endParaRPr>
-            </a:p>
-          </p:txBody>
-        </p:sp>
-        <p:sp>
-          <p:nvSpPr>
-            <p:cNvPr id="35" name="矩形 34"/>
-            <p:cNvSpPr/>
-            <p:nvPr/>
-          </p:nvSpPr>
-          <p:spPr>
-            <a:xfrm>
-              <a:off x="13994" y="2270"/>
-              <a:ext cx="3695" cy="885"/>
-            </a:xfrm>
-            <a:prstGeom prst="rect">
-              <a:avLst/>
-            </a:prstGeom>
-            <a:solidFill>
-              <a:srgbClr val="C5DFB2"/>
-            </a:solidFill>
-            <a:ln>
-              <a:solidFill>
-                <a:schemeClr val="tx1"/>
-              </a:solidFill>
-            </a:ln>
-          </p:spPr>
-          <p:style>
-            <a:lnRef idx="2">
-              <a:schemeClr val="accent1">
-                <a:lumMod val="75000"/>
-              </a:schemeClr>
-            </a:lnRef>
-            <a:fillRef idx="1">
-              <a:schemeClr val="accent1"/>
-            </a:fillRef>
-            <a:effectRef idx="0">
-              <a:srgbClr val="FFFFFF"/>
-            </a:effectRef>
-            <a:fontRef idx="minor">
-              <a:schemeClr val="lt1"/>
-            </a:fontRef>
-          </p:style>
-          <p:txBody>
-            <a:bodyPr vertOverflow="overflow" horzOverflow="overflow" vert="horz" wrap="square" numCol="1" spcCol="0" rtlCol="0" fromWordArt="0" anchor="ctr" anchorCtr="0" forceAA="0" compatLnSpc="1">
-              <a:noAutofit/>
-            </a:bodyPr>
-            <a:p>
-              <a:pPr lvl="0" algn="ctr">
-                <a:buClrTx/>
-                <a:buSzTx/>
-                <a:buFontTx/>
-              </a:pPr>
-              <a:r>
-                <a:rPr lang="zh-CN" altLang="en-US" sz="1600" b="1">
-                  <a:solidFill>
-                    <a:schemeClr val="tx1"/>
-                  </a:solidFill>
-                  <a:latin typeface="Times New Roman" panose="02020603050405020304" charset="0"/>
-                  <a:ea typeface="宋体" panose="02010600030101010101" pitchFamily="2" charset="-122"/>
-                  <a:cs typeface="Times New Roman" panose="02020603050405020304" charset="0"/>
-                  <a:sym typeface="+mn-ea"/>
-                </a:rPr>
-                <a:t>输出</a:t>
-              </a:r>
-              <a:endParaRPr lang="zh-CN" altLang="en-US" sz="1600" b="1">
+              <a:latin typeface="Times New Roman" panose="02020603050405020304" charset="0"/>
+              <a:ea typeface="宋体" panose="02010600030101010101" pitchFamily="2" charset="-122"/>
+              <a:cs typeface="Times New Roman" panose="02020603050405020304" charset="0"/>
+              <a:sym typeface="+mn-ea"/>
+            </a:endParaRPr>
+          </a:p>
+          <a:p>
+            <a:pPr lvl="0" algn="ctr">
+              <a:buClrTx/>
+              <a:buSzTx/>
+              <a:buFontTx/>
+            </a:pPr>
+            <a:r>
+              <a:rPr lang="zh-CN" altLang="en-US" sz="1600">
                 <a:solidFill>
                   <a:schemeClr val="tx1"/>
                 </a:solidFill>
@@ -3919,302 +3525,671 @@
                 <a:ea typeface="宋体" panose="02010600030101010101" pitchFamily="2" charset="-122"/>
                 <a:cs typeface="Times New Roman" panose="02020603050405020304" charset="0"/>
                 <a:sym typeface="+mn-ea"/>
-              </a:endParaRPr>
-            </a:p>
-          </p:txBody>
-        </p:sp>
-        <p:sp>
-          <p:nvSpPr>
-            <p:cNvPr id="41" name="右箭头 40"/>
-            <p:cNvSpPr/>
-            <p:nvPr/>
-          </p:nvSpPr>
-          <p:spPr>
-            <a:xfrm>
-              <a:off x="3992" y="5447"/>
-              <a:ext cx="826" cy="289"/>
-            </a:xfrm>
-            <a:prstGeom prst="rightArrow">
-              <a:avLst/>
-            </a:prstGeom>
+              </a:rPr>
+              <a:t>选择</a:t>
+            </a:r>
+            <a:endParaRPr lang="zh-CN" altLang="en-US" sz="1600">
+              <a:solidFill>
+                <a:schemeClr val="tx1"/>
+              </a:solidFill>
+              <a:latin typeface="Times New Roman" panose="02020603050405020304" charset="0"/>
+              <a:ea typeface="宋体" panose="02010600030101010101" pitchFamily="2" charset="-122"/>
+              <a:cs typeface="Times New Roman" panose="02020603050405020304" charset="0"/>
+              <a:sym typeface="+mn-ea"/>
+            </a:endParaRPr>
+          </a:p>
+        </p:txBody>
+      </p:sp>
+      <p:sp>
+        <p:nvSpPr>
+          <p:cNvPr id="29" name="矩形 28"/>
+          <p:cNvSpPr/>
+          <p:nvPr/>
+        </p:nvSpPr>
+        <p:spPr>
+          <a:xfrm>
+            <a:off x="4309745" y="118745"/>
+            <a:ext cx="880110" cy="4153535"/>
+          </a:xfrm>
+          <a:prstGeom prst="rect">
+            <a:avLst/>
+          </a:prstGeom>
+          <a:solidFill>
+            <a:srgbClr val="C5DFB2"/>
+          </a:solidFill>
+          <a:ln>
             <a:solidFill>
-              <a:srgbClr val="C5DEB6"/>
+              <a:schemeClr val="tx1"/>
             </a:solidFill>
-            <a:ln>
-              <a:noFill/>
-            </a:ln>
-          </p:spPr>
-          <p:style>
-            <a:lnRef idx="2">
-              <a:schemeClr val="accent1">
-                <a:lumMod val="75000"/>
-              </a:schemeClr>
-            </a:lnRef>
-            <a:fillRef idx="1">
-              <a:schemeClr val="accent1"/>
-            </a:fillRef>
-            <a:effectRef idx="0">
-              <a:srgbClr val="FFFFFF"/>
-            </a:effectRef>
-            <a:fontRef idx="minor">
-              <a:schemeClr val="lt1"/>
-            </a:fontRef>
-          </p:style>
-          <p:txBody>
-            <a:bodyPr rtlCol="0" anchor="ctr"/>
-            <a:p>
-              <a:pPr algn="ctr"/>
-              <a:endParaRPr lang="zh-CN" altLang="en-US"/>
-            </a:p>
-          </p:txBody>
-        </p:sp>
-        <p:sp>
-          <p:nvSpPr>
-            <p:cNvPr id="42" name="右箭头 41"/>
-            <p:cNvSpPr/>
-            <p:nvPr/>
-          </p:nvSpPr>
-          <p:spPr>
-            <a:xfrm>
-              <a:off x="6016" y="5447"/>
-              <a:ext cx="949" cy="289"/>
-            </a:xfrm>
-            <a:prstGeom prst="rightArrow">
-              <a:avLst/>
-            </a:prstGeom>
+          </a:ln>
+        </p:spPr>
+        <p:style>
+          <a:lnRef idx="2">
+            <a:schemeClr val="accent1">
+              <a:lumMod val="75000"/>
+            </a:schemeClr>
+          </a:lnRef>
+          <a:fillRef idx="1">
+            <a:schemeClr val="accent1"/>
+          </a:fillRef>
+          <a:effectRef idx="0">
+            <a:srgbClr val="FFFFFF"/>
+          </a:effectRef>
+          <a:fontRef idx="minor">
+            <a:schemeClr val="lt1"/>
+          </a:fontRef>
+        </p:style>
+        <p:txBody>
+          <a:bodyPr vertOverflow="overflow" horzOverflow="overflow" vert="horz" wrap="square" numCol="1" spcCol="0" rtlCol="0" fromWordArt="0" anchor="ctr" anchorCtr="0" forceAA="0" compatLnSpc="1">
+            <a:noAutofit/>
+          </a:bodyPr>
+          <a:p>
+            <a:pPr lvl="0" algn="ctr">
+              <a:buClrTx/>
+              <a:buSzTx/>
+              <a:buFontTx/>
+            </a:pPr>
+            <a:r>
+              <a:rPr lang="zh-CN" sz="1600">
+                <a:solidFill>
+                  <a:schemeClr val="tx1"/>
+                </a:solidFill>
+                <a:latin typeface="Times New Roman" panose="02020603050405020304" charset="0"/>
+                <a:ea typeface="宋体" panose="02010600030101010101" pitchFamily="2" charset="-122"/>
+                <a:cs typeface="Times New Roman" panose="02020603050405020304" charset="0"/>
+                <a:sym typeface="+mn-ea"/>
+              </a:rPr>
+              <a:t>感知驱动细分因子计算</a:t>
+            </a:r>
+            <a:endParaRPr lang="zh-CN" sz="1600">
+              <a:solidFill>
+                <a:schemeClr val="tx1"/>
+              </a:solidFill>
+              <a:latin typeface="Times New Roman" panose="02020603050405020304" charset="0"/>
+              <a:ea typeface="宋体" panose="02010600030101010101" pitchFamily="2" charset="-122"/>
+              <a:cs typeface="Times New Roman" panose="02020603050405020304" charset="0"/>
+              <a:sym typeface="+mn-ea"/>
+            </a:endParaRPr>
+          </a:p>
+        </p:txBody>
+      </p:sp>
+      <p:sp>
+        <p:nvSpPr>
+          <p:cNvPr id="30" name="矩形 29"/>
+          <p:cNvSpPr/>
+          <p:nvPr/>
+        </p:nvSpPr>
+        <p:spPr>
+          <a:xfrm>
+            <a:off x="5805170" y="118745"/>
+            <a:ext cx="749300" cy="4153535"/>
+          </a:xfrm>
+          <a:prstGeom prst="rect">
+            <a:avLst/>
+          </a:prstGeom>
+          <a:solidFill>
+            <a:srgbClr val="C5DFB2"/>
+          </a:solidFill>
+          <a:ln>
             <a:solidFill>
-              <a:srgbClr val="C5DEB6"/>
+              <a:schemeClr val="tx1"/>
             </a:solidFill>
-            <a:ln>
-              <a:noFill/>
-            </a:ln>
-          </p:spPr>
-          <p:style>
-            <a:lnRef idx="2">
-              <a:schemeClr val="accent1">
-                <a:lumMod val="75000"/>
-              </a:schemeClr>
-            </a:lnRef>
-            <a:fillRef idx="1">
-              <a:schemeClr val="accent1"/>
-            </a:fillRef>
-            <a:effectRef idx="0">
-              <a:srgbClr val="FFFFFF"/>
-            </a:effectRef>
-            <a:fontRef idx="minor">
-              <a:schemeClr val="lt1"/>
-            </a:fontRef>
-          </p:style>
-          <p:txBody>
-            <a:bodyPr rtlCol="0" anchor="ctr"/>
-            <a:p>
-              <a:pPr algn="ctr"/>
-              <a:endParaRPr lang="zh-CN" altLang="en-US"/>
-            </a:p>
-          </p:txBody>
-        </p:sp>
-        <p:sp>
-          <p:nvSpPr>
-            <p:cNvPr id="43" name="右箭头 42"/>
-            <p:cNvSpPr/>
-            <p:nvPr/>
-          </p:nvSpPr>
-          <p:spPr>
-            <a:xfrm>
-              <a:off x="8383" y="5447"/>
-              <a:ext cx="949" cy="289"/>
-            </a:xfrm>
-            <a:prstGeom prst="rightArrow">
-              <a:avLst/>
-            </a:prstGeom>
+          </a:ln>
+        </p:spPr>
+        <p:style>
+          <a:lnRef idx="2">
+            <a:schemeClr val="accent1">
+              <a:lumMod val="75000"/>
+            </a:schemeClr>
+          </a:lnRef>
+          <a:fillRef idx="1">
+            <a:schemeClr val="accent1"/>
+          </a:fillRef>
+          <a:effectRef idx="0">
+            <a:srgbClr val="FFFFFF"/>
+          </a:effectRef>
+          <a:fontRef idx="minor">
+            <a:schemeClr val="lt1"/>
+          </a:fontRef>
+        </p:style>
+        <p:txBody>
+          <a:bodyPr vertOverflow="overflow" horzOverflow="overflow" vert="horz" wrap="square" numCol="1" spcCol="0" rtlCol="0" fromWordArt="0" anchor="ctr" anchorCtr="0" forceAA="0" compatLnSpc="1">
+            <a:noAutofit/>
+          </a:bodyPr>
+          <a:p>
+            <a:pPr lvl="0" algn="ctr">
+              <a:buClrTx/>
+              <a:buSzTx/>
+              <a:buFontTx/>
+            </a:pPr>
+            <a:r>
+              <a:rPr lang="en-US" altLang="zh-CN" sz="1600">
+                <a:solidFill>
+                  <a:schemeClr val="tx1"/>
+                </a:solidFill>
+                <a:latin typeface="Times New Roman" panose="02020603050405020304" charset="0"/>
+                <a:ea typeface="宋体" panose="02010600030101010101" pitchFamily="2" charset="-122"/>
+                <a:cs typeface="Times New Roman" panose="02020603050405020304" charset="0"/>
+                <a:sym typeface="+mn-ea"/>
+              </a:rPr>
+              <a:t>GPU</a:t>
+            </a:r>
+            <a:r>
+              <a:rPr lang="zh-CN" altLang="en-US" sz="1600">
+                <a:solidFill>
+                  <a:schemeClr val="tx1"/>
+                </a:solidFill>
+                <a:latin typeface="Times New Roman" panose="02020603050405020304" charset="0"/>
+                <a:ea typeface="宋体" panose="02010600030101010101" pitchFamily="2" charset="-122"/>
+                <a:cs typeface="Times New Roman" panose="02020603050405020304" charset="0"/>
+                <a:sym typeface="+mn-ea"/>
+              </a:rPr>
+              <a:t>自适应镶嵌细分</a:t>
+            </a:r>
+            <a:endParaRPr lang="zh-CN" altLang="en-US" sz="1600">
+              <a:solidFill>
+                <a:schemeClr val="tx1"/>
+              </a:solidFill>
+              <a:latin typeface="Times New Roman" panose="02020603050405020304" charset="0"/>
+              <a:ea typeface="宋体" panose="02010600030101010101" pitchFamily="2" charset="-122"/>
+              <a:cs typeface="Times New Roman" panose="02020603050405020304" charset="0"/>
+              <a:sym typeface="+mn-ea"/>
+            </a:endParaRPr>
+          </a:p>
+        </p:txBody>
+      </p:sp>
+      <p:sp>
+        <p:nvSpPr>
+          <p:cNvPr id="33" name="矩形 32"/>
+          <p:cNvSpPr/>
+          <p:nvPr/>
+        </p:nvSpPr>
+        <p:spPr>
+          <a:xfrm>
+            <a:off x="7284085" y="119380"/>
+            <a:ext cx="723900" cy="4153535"/>
+          </a:xfrm>
+          <a:prstGeom prst="rect">
+            <a:avLst/>
+          </a:prstGeom>
+          <a:solidFill>
+            <a:srgbClr val="C5DFB2"/>
+          </a:solidFill>
+          <a:ln>
             <a:solidFill>
-              <a:srgbClr val="C5DEB6"/>
+              <a:schemeClr val="tx1"/>
             </a:solidFill>
-            <a:ln>
-              <a:noFill/>
-            </a:ln>
-          </p:spPr>
-          <p:style>
-            <a:lnRef idx="2">
-              <a:schemeClr val="accent1">
-                <a:lumMod val="75000"/>
-              </a:schemeClr>
-            </a:lnRef>
-            <a:fillRef idx="1">
-              <a:schemeClr val="accent1"/>
-            </a:fillRef>
-            <a:effectRef idx="0">
-              <a:srgbClr val="FFFFFF"/>
-            </a:effectRef>
-            <a:fontRef idx="minor">
-              <a:schemeClr val="lt1"/>
-            </a:fontRef>
-          </p:style>
-          <p:txBody>
-            <a:bodyPr rtlCol="0" anchor="ctr"/>
-            <a:p>
-              <a:pPr algn="ctr"/>
-              <a:endParaRPr lang="zh-CN" altLang="en-US"/>
-            </a:p>
-          </p:txBody>
-        </p:sp>
-        <p:sp>
-          <p:nvSpPr>
-            <p:cNvPr id="44" name="右箭头 43"/>
-            <p:cNvSpPr/>
-            <p:nvPr/>
-          </p:nvSpPr>
-          <p:spPr>
-            <a:xfrm>
-              <a:off x="10481" y="5447"/>
-              <a:ext cx="1154" cy="289"/>
-            </a:xfrm>
-            <a:prstGeom prst="rightArrow">
-              <a:avLst/>
-            </a:prstGeom>
+          </a:ln>
+        </p:spPr>
+        <p:style>
+          <a:lnRef idx="2">
+            <a:schemeClr val="accent1">
+              <a:lumMod val="75000"/>
+            </a:schemeClr>
+          </a:lnRef>
+          <a:fillRef idx="1">
+            <a:schemeClr val="accent1"/>
+          </a:fillRef>
+          <a:effectRef idx="0">
+            <a:srgbClr val="FFFFFF"/>
+          </a:effectRef>
+          <a:fontRef idx="minor">
+            <a:schemeClr val="lt1"/>
+          </a:fontRef>
+        </p:style>
+        <p:txBody>
+          <a:bodyPr vertOverflow="overflow" horzOverflow="overflow" vert="horz" wrap="square" numCol="1" spcCol="0" rtlCol="0" fromWordArt="0" anchor="ctr" anchorCtr="0" forceAA="0" compatLnSpc="1">
+            <a:noAutofit/>
+          </a:bodyPr>
+          <a:p>
+            <a:pPr lvl="0" algn="ctr">
+              <a:buClrTx/>
+              <a:buSzTx/>
+              <a:buFontTx/>
+            </a:pPr>
+            <a:r>
+              <a:rPr lang="zh-CN" sz="1600">
+                <a:solidFill>
+                  <a:schemeClr val="tx1"/>
+                </a:solidFill>
+                <a:latin typeface="Times New Roman" panose="02020603050405020304" charset="0"/>
+                <a:ea typeface="宋体" panose="02010600030101010101" pitchFamily="2" charset="-122"/>
+                <a:cs typeface="Times New Roman" panose="02020603050405020304" charset="0"/>
+                <a:sym typeface="+mn-ea"/>
+              </a:rPr>
+              <a:t>纹理与过渡处理</a:t>
+            </a:r>
+            <a:endParaRPr lang="zh-CN" sz="1600">
+              <a:solidFill>
+                <a:schemeClr val="tx1"/>
+              </a:solidFill>
+              <a:latin typeface="Times New Roman" panose="02020603050405020304" charset="0"/>
+              <a:ea typeface="宋体" panose="02010600030101010101" pitchFamily="2" charset="-122"/>
+              <a:cs typeface="Times New Roman" panose="02020603050405020304" charset="0"/>
+              <a:sym typeface="+mn-ea"/>
+            </a:endParaRPr>
+          </a:p>
+        </p:txBody>
+      </p:sp>
+      <p:sp>
+        <p:nvSpPr>
+          <p:cNvPr id="34" name="矩形 33"/>
+          <p:cNvSpPr/>
+          <p:nvPr/>
+        </p:nvSpPr>
+        <p:spPr>
+          <a:xfrm>
+            <a:off x="8761095" y="681355"/>
+            <a:ext cx="2345690" cy="3592195"/>
+          </a:xfrm>
+          <a:prstGeom prst="rect">
+            <a:avLst/>
+          </a:prstGeom>
+          <a:solidFill>
+            <a:srgbClr val="E6F1E0"/>
+          </a:solidFill>
+          <a:ln>
             <a:solidFill>
-              <a:srgbClr val="C5DEB6"/>
+              <a:schemeClr val="tx1"/>
             </a:solidFill>
-            <a:ln>
-              <a:noFill/>
-            </a:ln>
-          </p:spPr>
-          <p:style>
-            <a:lnRef idx="2">
-              <a:schemeClr val="accent1">
-                <a:lumMod val="75000"/>
-              </a:schemeClr>
-            </a:lnRef>
-            <a:fillRef idx="1">
-              <a:schemeClr val="accent1"/>
-            </a:fillRef>
-            <a:effectRef idx="0">
-              <a:srgbClr val="FFFFFF"/>
-            </a:effectRef>
-            <a:fontRef idx="minor">
-              <a:schemeClr val="lt1"/>
-            </a:fontRef>
-          </p:style>
-          <p:txBody>
-            <a:bodyPr rtlCol="0" anchor="ctr"/>
-            <a:p>
-              <a:pPr algn="ctr"/>
-              <a:endParaRPr lang="zh-CN" altLang="en-US"/>
-            </a:p>
-          </p:txBody>
-        </p:sp>
-        <p:sp>
-          <p:nvSpPr>
-            <p:cNvPr id="45" name="右箭头 44"/>
-            <p:cNvSpPr/>
-            <p:nvPr/>
-          </p:nvSpPr>
-          <p:spPr>
-            <a:xfrm>
-              <a:off x="12828" y="5447"/>
-              <a:ext cx="1154" cy="289"/>
-            </a:xfrm>
-            <a:prstGeom prst="rightArrow">
-              <a:avLst/>
-            </a:prstGeom>
+          </a:ln>
+        </p:spPr>
+        <p:style>
+          <a:lnRef idx="2">
+            <a:schemeClr val="accent1">
+              <a:lumMod val="75000"/>
+            </a:schemeClr>
+          </a:lnRef>
+          <a:fillRef idx="1">
+            <a:schemeClr val="accent1"/>
+          </a:fillRef>
+          <a:effectRef idx="0">
+            <a:srgbClr val="FFFFFF"/>
+          </a:effectRef>
+          <a:fontRef idx="minor">
+            <a:schemeClr val="lt1"/>
+          </a:fontRef>
+        </p:style>
+        <p:txBody>
+          <a:bodyPr vertOverflow="overflow" horzOverflow="overflow" vert="horz" wrap="square" numCol="1" spcCol="0" rtlCol="0" fromWordArt="0" anchor="ctr" anchorCtr="0" forceAA="0" compatLnSpc="1">
+            <a:noAutofit/>
+          </a:bodyPr>
+          <a:p>
+            <a:pPr lvl="0" algn="ctr">
+              <a:buClrTx/>
+              <a:buSzTx/>
+              <a:buFontTx/>
+            </a:pPr>
+            <a:endParaRPr lang="zh-CN" altLang="en-US">
+              <a:sym typeface="+mn-ea"/>
+            </a:endParaRPr>
+          </a:p>
+        </p:txBody>
+      </p:sp>
+      <p:sp>
+        <p:nvSpPr>
+          <p:cNvPr id="35" name="矩形 34"/>
+          <p:cNvSpPr/>
+          <p:nvPr/>
+        </p:nvSpPr>
+        <p:spPr>
+          <a:xfrm>
+            <a:off x="8761095" y="119380"/>
+            <a:ext cx="2346325" cy="561975"/>
+          </a:xfrm>
+          <a:prstGeom prst="rect">
+            <a:avLst/>
+          </a:prstGeom>
+          <a:solidFill>
+            <a:srgbClr val="C5DFB2"/>
+          </a:solidFill>
+          <a:ln>
             <a:solidFill>
-              <a:srgbClr val="C5DEB6"/>
+              <a:schemeClr val="tx1"/>
             </a:solidFill>
-            <a:ln>
-              <a:noFill/>
-            </a:ln>
-          </p:spPr>
-          <p:style>
-            <a:lnRef idx="2">
-              <a:schemeClr val="accent1">
-                <a:lumMod val="75000"/>
-              </a:schemeClr>
-            </a:lnRef>
-            <a:fillRef idx="1">
-              <a:schemeClr val="accent1"/>
-            </a:fillRef>
-            <a:effectRef idx="0">
-              <a:srgbClr val="FFFFFF"/>
-            </a:effectRef>
-            <a:fontRef idx="minor">
-              <a:schemeClr val="lt1"/>
-            </a:fontRef>
-          </p:style>
-          <p:txBody>
-            <a:bodyPr rtlCol="0" anchor="ctr"/>
-            <a:p>
-              <a:pPr algn="ctr"/>
-              <a:endParaRPr lang="zh-CN" altLang="en-US"/>
-            </a:p>
-          </p:txBody>
-        </p:sp>
-        <p:pic>
-          <p:nvPicPr>
-            <p:cNvPr id="46" name="图片 45"/>
-            <p:cNvPicPr>
-              <a:picLocks noChangeAspect="1"/>
-            </p:cNvPicPr>
-            <p:nvPr/>
-          </p:nvPicPr>
-          <p:blipFill>
-            <a:blip r:embed="rId1"/>
-            <a:stretch>
-              <a:fillRect/>
-            </a:stretch>
-          </p:blipFill>
-          <p:spPr>
-            <a:xfrm>
-              <a:off x="14197" y="3407"/>
-              <a:ext cx="3290" cy="4068"/>
-            </a:xfrm>
-            <a:prstGeom prst="rect">
-              <a:avLst/>
-            </a:prstGeom>
-          </p:spPr>
-        </p:pic>
-        <p:sp>
-          <p:nvSpPr>
-            <p:cNvPr id="49" name="文本框 48"/>
-            <p:cNvSpPr txBox="1"/>
-            <p:nvPr/>
-          </p:nvSpPr>
-          <p:spPr>
-            <a:xfrm>
-              <a:off x="14131" y="7617"/>
-              <a:ext cx="3382" cy="963"/>
-            </a:xfrm>
-            <a:prstGeom prst="rect">
-              <a:avLst/>
-            </a:prstGeom>
+          </a:ln>
+        </p:spPr>
+        <p:style>
+          <a:lnRef idx="2">
+            <a:schemeClr val="accent1">
+              <a:lumMod val="75000"/>
+            </a:schemeClr>
+          </a:lnRef>
+          <a:fillRef idx="1">
+            <a:schemeClr val="accent1"/>
+          </a:fillRef>
+          <a:effectRef idx="0">
+            <a:srgbClr val="FFFFFF"/>
+          </a:effectRef>
+          <a:fontRef idx="minor">
+            <a:schemeClr val="lt1"/>
+          </a:fontRef>
+        </p:style>
+        <p:txBody>
+          <a:bodyPr vertOverflow="overflow" horzOverflow="overflow" vert="horz" wrap="square" numCol="1" spcCol="0" rtlCol="0" fromWordArt="0" anchor="ctr" anchorCtr="0" forceAA="0" compatLnSpc="1">
+            <a:noAutofit/>
+          </a:bodyPr>
+          <a:p>
+            <a:pPr lvl="0" algn="ctr">
+              <a:buClrTx/>
+              <a:buSzTx/>
+              <a:buFontTx/>
+            </a:pPr>
+            <a:r>
+              <a:rPr lang="zh-CN" altLang="en-US" sz="1600" b="1">
+                <a:solidFill>
+                  <a:schemeClr val="tx1"/>
+                </a:solidFill>
+                <a:latin typeface="Times New Roman" panose="02020603050405020304" charset="0"/>
+                <a:ea typeface="宋体" panose="02010600030101010101" pitchFamily="2" charset="-122"/>
+                <a:cs typeface="Times New Roman" panose="02020603050405020304" charset="0"/>
+                <a:sym typeface="+mn-ea"/>
+              </a:rPr>
+              <a:t>输出</a:t>
+            </a:r>
+            <a:endParaRPr lang="zh-CN" altLang="en-US" sz="1600" b="1">
+              <a:solidFill>
+                <a:schemeClr val="tx1"/>
+              </a:solidFill>
+              <a:latin typeface="Times New Roman" panose="02020603050405020304" charset="0"/>
+              <a:ea typeface="宋体" panose="02010600030101010101" pitchFamily="2" charset="-122"/>
+              <a:cs typeface="Times New Roman" panose="02020603050405020304" charset="0"/>
+              <a:sym typeface="+mn-ea"/>
+            </a:endParaRPr>
+          </a:p>
+        </p:txBody>
+      </p:sp>
+      <p:sp>
+        <p:nvSpPr>
+          <p:cNvPr id="41" name="右箭头 40"/>
+          <p:cNvSpPr/>
+          <p:nvPr/>
+        </p:nvSpPr>
+        <p:spPr>
+          <a:xfrm>
+            <a:off x="2409825" y="2136775"/>
+            <a:ext cx="524510" cy="183515"/>
+          </a:xfrm>
+          <a:prstGeom prst="rightArrow">
+            <a:avLst/>
+          </a:prstGeom>
+          <a:solidFill>
+            <a:srgbClr val="C5DEB6"/>
+          </a:solidFill>
+          <a:ln>
             <a:noFill/>
-          </p:spPr>
-          <p:txBody>
-            <a:bodyPr wrap="square" rtlCol="0">
-              <a:noAutofit/>
-            </a:bodyPr>
-            <a:p>
-              <a:pPr algn="ctr"/>
-              <a:r>
-                <a:rPr lang="zh-CN" altLang="en-US" sz="1500" b="1">
-                  <a:solidFill>
-                    <a:schemeClr val="tx1"/>
-                  </a:solidFill>
-                  <a:latin typeface="宋体" panose="02010600030101010101" pitchFamily="2" charset="-122"/>
-                  <a:ea typeface="宋体" panose="02010600030101010101" pitchFamily="2" charset="-122"/>
-                </a:rPr>
-                <a:t>注视点区域细分程度较高，外围区域细分程度较低</a:t>
-              </a:r>
-              <a:endParaRPr lang="zh-CN" altLang="en-US" sz="1500" b="1">
+          </a:ln>
+        </p:spPr>
+        <p:style>
+          <a:lnRef idx="2">
+            <a:schemeClr val="accent1">
+              <a:lumMod val="75000"/>
+            </a:schemeClr>
+          </a:lnRef>
+          <a:fillRef idx="1">
+            <a:schemeClr val="accent1"/>
+          </a:fillRef>
+          <a:effectRef idx="0">
+            <a:srgbClr val="FFFFFF"/>
+          </a:effectRef>
+          <a:fontRef idx="minor">
+            <a:schemeClr val="lt1"/>
+          </a:fontRef>
+        </p:style>
+        <p:txBody>
+          <a:bodyPr rtlCol="0" anchor="ctr"/>
+          <a:p>
+            <a:pPr algn="ctr"/>
+            <a:endParaRPr lang="zh-CN" altLang="en-US"/>
+          </a:p>
+        </p:txBody>
+      </p:sp>
+      <p:sp>
+        <p:nvSpPr>
+          <p:cNvPr id="42" name="右箭头 41"/>
+          <p:cNvSpPr/>
+          <p:nvPr/>
+        </p:nvSpPr>
+        <p:spPr>
+          <a:xfrm>
+            <a:off x="3695065" y="2136775"/>
+            <a:ext cx="602615" cy="183515"/>
+          </a:xfrm>
+          <a:prstGeom prst="rightArrow">
+            <a:avLst/>
+          </a:prstGeom>
+          <a:solidFill>
+            <a:srgbClr val="C5DEB6"/>
+          </a:solidFill>
+          <a:ln>
+            <a:noFill/>
+          </a:ln>
+        </p:spPr>
+        <p:style>
+          <a:lnRef idx="2">
+            <a:schemeClr val="accent1">
+              <a:lumMod val="75000"/>
+            </a:schemeClr>
+          </a:lnRef>
+          <a:fillRef idx="1">
+            <a:schemeClr val="accent1"/>
+          </a:fillRef>
+          <a:effectRef idx="0">
+            <a:srgbClr val="FFFFFF"/>
+          </a:effectRef>
+          <a:fontRef idx="minor">
+            <a:schemeClr val="lt1"/>
+          </a:fontRef>
+        </p:style>
+        <p:txBody>
+          <a:bodyPr rtlCol="0" anchor="ctr"/>
+          <a:p>
+            <a:pPr algn="ctr"/>
+            <a:endParaRPr lang="zh-CN" altLang="en-US"/>
+          </a:p>
+        </p:txBody>
+      </p:sp>
+      <p:sp>
+        <p:nvSpPr>
+          <p:cNvPr id="43" name="右箭头 42"/>
+          <p:cNvSpPr/>
+          <p:nvPr/>
+        </p:nvSpPr>
+        <p:spPr>
+          <a:xfrm>
+            <a:off x="5198110" y="2136775"/>
+            <a:ext cx="602615" cy="183515"/>
+          </a:xfrm>
+          <a:prstGeom prst="rightArrow">
+            <a:avLst/>
+          </a:prstGeom>
+          <a:solidFill>
+            <a:srgbClr val="C5DEB6"/>
+          </a:solidFill>
+          <a:ln>
+            <a:noFill/>
+          </a:ln>
+        </p:spPr>
+        <p:style>
+          <a:lnRef idx="2">
+            <a:schemeClr val="accent1">
+              <a:lumMod val="75000"/>
+            </a:schemeClr>
+          </a:lnRef>
+          <a:fillRef idx="1">
+            <a:schemeClr val="accent1"/>
+          </a:fillRef>
+          <a:effectRef idx="0">
+            <a:srgbClr val="FFFFFF"/>
+          </a:effectRef>
+          <a:fontRef idx="minor">
+            <a:schemeClr val="lt1"/>
+          </a:fontRef>
+        </p:style>
+        <p:txBody>
+          <a:bodyPr rtlCol="0" anchor="ctr"/>
+          <a:p>
+            <a:pPr algn="ctr"/>
+            <a:endParaRPr lang="zh-CN" altLang="en-US"/>
+          </a:p>
+        </p:txBody>
+      </p:sp>
+      <p:sp>
+        <p:nvSpPr>
+          <p:cNvPr id="44" name="右箭头 43"/>
+          <p:cNvSpPr/>
+          <p:nvPr/>
+        </p:nvSpPr>
+        <p:spPr>
+          <a:xfrm>
+            <a:off x="6530340" y="2136775"/>
+            <a:ext cx="732790" cy="183515"/>
+          </a:xfrm>
+          <a:prstGeom prst="rightArrow">
+            <a:avLst/>
+          </a:prstGeom>
+          <a:solidFill>
+            <a:srgbClr val="C5DEB6"/>
+          </a:solidFill>
+          <a:ln>
+            <a:noFill/>
+          </a:ln>
+        </p:spPr>
+        <p:style>
+          <a:lnRef idx="2">
+            <a:schemeClr val="accent1">
+              <a:lumMod val="75000"/>
+            </a:schemeClr>
+          </a:lnRef>
+          <a:fillRef idx="1">
+            <a:schemeClr val="accent1"/>
+          </a:fillRef>
+          <a:effectRef idx="0">
+            <a:srgbClr val="FFFFFF"/>
+          </a:effectRef>
+          <a:fontRef idx="minor">
+            <a:schemeClr val="lt1"/>
+          </a:fontRef>
+        </p:style>
+        <p:txBody>
+          <a:bodyPr rtlCol="0" anchor="ctr"/>
+          <a:p>
+            <a:pPr algn="ctr"/>
+            <a:endParaRPr lang="zh-CN" altLang="en-US"/>
+          </a:p>
+        </p:txBody>
+      </p:sp>
+      <p:sp>
+        <p:nvSpPr>
+          <p:cNvPr id="45" name="右箭头 44"/>
+          <p:cNvSpPr/>
+          <p:nvPr/>
+        </p:nvSpPr>
+        <p:spPr>
+          <a:xfrm>
+            <a:off x="8020685" y="2136775"/>
+            <a:ext cx="732790" cy="183515"/>
+          </a:xfrm>
+          <a:prstGeom prst="rightArrow">
+            <a:avLst/>
+          </a:prstGeom>
+          <a:solidFill>
+            <a:srgbClr val="C5DEB6"/>
+          </a:solidFill>
+          <a:ln>
+            <a:noFill/>
+          </a:ln>
+        </p:spPr>
+        <p:style>
+          <a:lnRef idx="2">
+            <a:schemeClr val="accent1">
+              <a:lumMod val="75000"/>
+            </a:schemeClr>
+          </a:lnRef>
+          <a:fillRef idx="1">
+            <a:schemeClr val="accent1"/>
+          </a:fillRef>
+          <a:effectRef idx="0">
+            <a:srgbClr val="FFFFFF"/>
+          </a:effectRef>
+          <a:fontRef idx="minor">
+            <a:schemeClr val="lt1"/>
+          </a:fontRef>
+        </p:style>
+        <p:txBody>
+          <a:bodyPr rtlCol="0" anchor="ctr"/>
+          <a:p>
+            <a:pPr algn="ctr"/>
+            <a:endParaRPr lang="zh-CN" altLang="en-US"/>
+          </a:p>
+        </p:txBody>
+      </p:sp>
+      <p:pic>
+        <p:nvPicPr>
+          <p:cNvPr id="46" name="图片 45"/>
+          <p:cNvPicPr>
+            <a:picLocks noChangeAspect="1"/>
+          </p:cNvPicPr>
+          <p:nvPr/>
+        </p:nvPicPr>
+        <p:blipFill>
+          <a:blip r:embed="rId1"/>
+          <a:stretch>
+            <a:fillRect/>
+          </a:stretch>
+        </p:blipFill>
+        <p:spPr>
+          <a:xfrm>
+            <a:off x="8890000" y="841375"/>
+            <a:ext cx="2089150" cy="2583180"/>
+          </a:xfrm>
+          <a:prstGeom prst="rect">
+            <a:avLst/>
+          </a:prstGeom>
+        </p:spPr>
+      </p:pic>
+      <p:sp>
+        <p:nvSpPr>
+          <p:cNvPr id="49" name="文本框 48"/>
+          <p:cNvSpPr txBox="1"/>
+          <p:nvPr/>
+        </p:nvSpPr>
+        <p:spPr>
+          <a:xfrm>
+            <a:off x="8848090" y="3514725"/>
+            <a:ext cx="2147570" cy="611505"/>
+          </a:xfrm>
+          <a:prstGeom prst="rect">
+            <a:avLst/>
+          </a:prstGeom>
+          <a:noFill/>
+        </p:spPr>
+        <p:txBody>
+          <a:bodyPr wrap="square" rtlCol="0">
+            <a:noAutofit/>
+          </a:bodyPr>
+          <a:p>
+            <a:pPr algn="ctr"/>
+            <a:r>
+              <a:rPr lang="zh-CN" altLang="en-US" sz="1500">
                 <a:solidFill>
                   <a:schemeClr val="tx1"/>
                 </a:solidFill>
                 <a:latin typeface="宋体" panose="02010600030101010101" pitchFamily="2" charset="-122"/>
                 <a:ea typeface="宋体" panose="02010600030101010101" pitchFamily="2" charset="-122"/>
-              </a:endParaRPr>
-            </a:p>
-          </p:txBody>
-        </p:sp>
-      </p:grpSp>
+              </a:rPr>
+              <a:t>注视点区域细分程度较高，外围区域细分程度较低</a:t>
+            </a:r>
+            <a:endParaRPr lang="zh-CN" altLang="en-US" sz="1500">
+              <a:solidFill>
+                <a:schemeClr val="tx1"/>
+              </a:solidFill>
+              <a:latin typeface="宋体" panose="02010600030101010101" pitchFamily="2" charset="-122"/>
+              <a:ea typeface="宋体" panose="02010600030101010101" pitchFamily="2" charset="-122"/>
+            </a:endParaRPr>
+          </a:p>
+        </p:txBody>
+      </p:sp>
     </p:spTree>
   </p:cSld>
   <p:clrMapOvr>
